--- a/Xong/ThucHanh_Slide_Nhom5.pptx
+++ b/Xong/ThucHanh_Slide_Nhom5.pptx
@@ -1911,11 +1911,6 @@
 <file path=ppt/slideLayouts/slideLayout1.xml><?xml version="1.0" encoding="utf-8"?>
 <p:sldLayout xmlns:a="http://schemas.openxmlformats.org/drawingml/2006/main" xmlns:r="http://schemas.openxmlformats.org/officeDocument/2006/relationships" xmlns:p="http://schemas.openxmlformats.org/presentationml/2006/main" preserve="1">
   <p:cSld name="DEFAULT">
-    <p:bg>
-      <p:bgRef idx="1001">
-        <a:schemeClr val="bg1"/>
-      </p:bgRef>
-    </p:bg>
     <p:spTree>
       <p:nvGrpSpPr>
         <p:cNvPr id="1" name=""/>
@@ -2223,14 +2218,6 @@
 <file path=ppt/slides/slide1.xml><?xml version="1.0" encoding="utf-8"?>
 <p:sld xmlns:a="http://schemas.openxmlformats.org/drawingml/2006/main" xmlns:r="http://schemas.openxmlformats.org/officeDocument/2006/relationships" xmlns:p="http://schemas.openxmlformats.org/presentationml/2006/main">
   <p:cSld name="Slide 1">
-    <p:bg>
-      <p:bgPr>
-        <a:solidFill>
-          <a:srgbClr val="1E2761"/>
-        </a:solidFill>
-        <a:effectLst/>
-      </p:bgPr>
-    </p:bg>
     <p:spTree>
       <p:nvGrpSpPr>
         <p:cNvPr id="1" name=""/>
@@ -2247,14 +2234,14 @@
       </p:grpSpPr>
       <p:sp>
         <p:nvSpPr>
-          <p:cNvPr id="2" name="Text 0"/>
+          <p:cNvPr id="3" name="Text 1"/>
           <p:cNvSpPr txBox="1"/>
           <p:nvPr/>
         </p:nvSpPr>
         <p:spPr>
           <a:xfrm>
-            <a:off x="640080" y="731520"/>
-            <a:ext cx="7863840" cy="274320"/>
+            <a:off x="687887" y="1828676"/>
+            <a:ext cx="7863840" cy="1325880"/>
           </a:xfrm>
           <a:prstGeom prst="rect">
             <a:avLst/>
@@ -2266,34 +2253,239 @@
           <a:bodyPr wrap="square" lIns="0" tIns="0" rIns="0" bIns="0" rtlCol="0" anchor="ctr"/>
           <a:lstStyle/>
           <a:p>
-            <a:pPr marL="0" indent="0">
+            <a:pPr marL="0" indent="0" algn="ctr">
+              <a:lnSpc>
+                <a:spcPts val="4000"/>
+              </a:lnSpc>
               <a:buNone/>
             </a:pPr>
             <a:r>
-              <a:rPr lang="en-US" sz="1150" b="1" kern="0" spc="180" dirty="0">
+              <a:rPr lang="en-US" sz="3600" b="1" dirty="0">
                 <a:solidFill>
-                  <a:srgbClr val="E08A1E"/>
+                  <a:srgbClr val="1E2761"/>
                 </a:solidFill>
-                <a:latin typeface="Calibri" pitchFamily="34" charset="0"/>
-                <a:ea typeface="Calibri" pitchFamily="34" charset="-122"/>
-                <a:cs typeface="Calibri" pitchFamily="34" charset="-120"/>
+                <a:latin typeface="Cambria" pitchFamily="34" charset="0"/>
+                <a:ea typeface="Cambria" pitchFamily="34" charset="-122"/>
+                <a:cs typeface="Cambria" pitchFamily="34" charset="-120"/>
               </a:rPr>
-              <a:t>BÀI THỰC HÀNH · THUYẾT MINH ĐỀ TÀI PHÁT TRIỂN PHẦN MỀM</a:t>
+              <a:t>Ứng dụng AI </a:t>
             </a:r>
-            <a:endParaRPr lang="en-US" sz="1150" dirty="0"/>
+            <a:r>
+              <a:rPr lang="en-US" sz="3600" b="1" dirty="0" err="1">
+                <a:solidFill>
+                  <a:srgbClr val="1E2761"/>
+                </a:solidFill>
+                <a:latin typeface="Cambria" pitchFamily="34" charset="0"/>
+                <a:ea typeface="Cambria" pitchFamily="34" charset="-122"/>
+                <a:cs typeface="Cambria" pitchFamily="34" charset="-120"/>
+              </a:rPr>
+              <a:t>dự</a:t>
+            </a:r>
+            <a:r>
+              <a:rPr lang="en-US" sz="3600" b="1" dirty="0">
+                <a:solidFill>
+                  <a:srgbClr val="1E2761"/>
+                </a:solidFill>
+                <a:latin typeface="Cambria" pitchFamily="34" charset="0"/>
+                <a:ea typeface="Cambria" pitchFamily="34" charset="-122"/>
+                <a:cs typeface="Cambria" pitchFamily="34" charset="-120"/>
+              </a:rPr>
+              <a:t> </a:t>
+            </a:r>
+            <a:r>
+              <a:rPr lang="en-US" sz="3600" b="1" dirty="0" err="1">
+                <a:solidFill>
+                  <a:srgbClr val="1E2761"/>
+                </a:solidFill>
+                <a:latin typeface="Cambria" pitchFamily="34" charset="0"/>
+                <a:ea typeface="Cambria" pitchFamily="34" charset="-122"/>
+                <a:cs typeface="Cambria" pitchFamily="34" charset="-120"/>
+              </a:rPr>
+              <a:t>báo</a:t>
+            </a:r>
+            <a:r>
+              <a:rPr lang="en-US" sz="3600" dirty="0">
+                <a:solidFill>
+                  <a:srgbClr val="1E2761"/>
+                </a:solidFill>
+              </a:rPr>
+              <a:t> </a:t>
+            </a:r>
+            <a:r>
+              <a:rPr lang="en-US" sz="3600" b="1" dirty="0" err="1">
+                <a:solidFill>
+                  <a:srgbClr val="1E2761"/>
+                </a:solidFill>
+                <a:latin typeface="Cambria" pitchFamily="34" charset="0"/>
+                <a:ea typeface="Cambria" pitchFamily="34" charset="-122"/>
+                <a:cs typeface="Cambria" pitchFamily="34" charset="-120"/>
+              </a:rPr>
+              <a:t>lưu</a:t>
+            </a:r>
+            <a:r>
+              <a:rPr lang="en-US" sz="3600" b="1" dirty="0">
+                <a:solidFill>
+                  <a:srgbClr val="1E2761"/>
+                </a:solidFill>
+                <a:latin typeface="Cambria" pitchFamily="34" charset="0"/>
+                <a:ea typeface="Cambria" pitchFamily="34" charset="-122"/>
+                <a:cs typeface="Cambria" pitchFamily="34" charset="-120"/>
+              </a:rPr>
+              <a:t> lượng </a:t>
+            </a:r>
+            <a:r>
+              <a:rPr lang="en-US" sz="3600" b="1" dirty="0" err="1">
+                <a:solidFill>
+                  <a:srgbClr val="1E2761"/>
+                </a:solidFill>
+                <a:latin typeface="Cambria" pitchFamily="34" charset="0"/>
+                <a:ea typeface="Cambria" pitchFamily="34" charset="-122"/>
+                <a:cs typeface="Cambria" pitchFamily="34" charset="-120"/>
+              </a:rPr>
+              <a:t>khách</a:t>
+            </a:r>
+            <a:r>
+              <a:rPr lang="en-US" sz="3600" b="1" dirty="0">
+                <a:solidFill>
+                  <a:srgbClr val="1E2761"/>
+                </a:solidFill>
+                <a:latin typeface="Cambria" pitchFamily="34" charset="0"/>
+                <a:ea typeface="Cambria" pitchFamily="34" charset="-122"/>
+                <a:cs typeface="Cambria" pitchFamily="34" charset="-120"/>
+              </a:rPr>
+              <a:t> </a:t>
+            </a:r>
+            <a:r>
+              <a:rPr lang="en-US" sz="3600" b="1" dirty="0" err="1">
+                <a:solidFill>
+                  <a:srgbClr val="1E2761"/>
+                </a:solidFill>
+                <a:latin typeface="Cambria" pitchFamily="34" charset="0"/>
+                <a:ea typeface="Cambria" pitchFamily="34" charset="-122"/>
+                <a:cs typeface="Cambria" pitchFamily="34" charset="-120"/>
+              </a:rPr>
+              <a:t>hàng</a:t>
+            </a:r>
+            <a:r>
+              <a:rPr lang="en-US" sz="3600" b="1" dirty="0">
+                <a:solidFill>
+                  <a:srgbClr val="1E2761"/>
+                </a:solidFill>
+                <a:latin typeface="Cambria" pitchFamily="34" charset="0"/>
+                <a:ea typeface="Cambria" pitchFamily="34" charset="-122"/>
+                <a:cs typeface="Cambria" pitchFamily="34" charset="-120"/>
+              </a:rPr>
+              <a:t> </a:t>
+            </a:r>
+            <a:r>
+              <a:rPr lang="en-US" sz="3600" b="1" dirty="0" err="1">
+                <a:solidFill>
+                  <a:srgbClr val="1E2761"/>
+                </a:solidFill>
+                <a:latin typeface="Cambria" pitchFamily="34" charset="0"/>
+                <a:ea typeface="Cambria" pitchFamily="34" charset="-122"/>
+                <a:cs typeface="Cambria" pitchFamily="34" charset="-120"/>
+              </a:rPr>
+              <a:t>cho</a:t>
+            </a:r>
+            <a:r>
+              <a:rPr lang="en-US" sz="3600" b="1" dirty="0">
+                <a:solidFill>
+                  <a:srgbClr val="1E2761"/>
+                </a:solidFill>
+                <a:latin typeface="Cambria" pitchFamily="34" charset="0"/>
+                <a:ea typeface="Cambria" pitchFamily="34" charset="-122"/>
+                <a:cs typeface="Cambria" pitchFamily="34" charset="-120"/>
+              </a:rPr>
+              <a:t> </a:t>
+            </a:r>
+            <a:r>
+              <a:rPr lang="en-US" sz="3600" b="1" dirty="0" err="1">
+                <a:solidFill>
+                  <a:srgbClr val="1E2761"/>
+                </a:solidFill>
+                <a:latin typeface="Cambria" pitchFamily="34" charset="0"/>
+                <a:ea typeface="Cambria" pitchFamily="34" charset="-122"/>
+                <a:cs typeface="Cambria" pitchFamily="34" charset="-120"/>
+              </a:rPr>
+              <a:t>chuỗi</a:t>
+            </a:r>
+            <a:r>
+              <a:rPr lang="en-US" sz="3600" b="1" dirty="0">
+                <a:solidFill>
+                  <a:srgbClr val="1E2761"/>
+                </a:solidFill>
+                <a:latin typeface="Cambria" pitchFamily="34" charset="0"/>
+                <a:ea typeface="Cambria" pitchFamily="34" charset="-122"/>
+                <a:cs typeface="Cambria" pitchFamily="34" charset="-120"/>
+              </a:rPr>
+              <a:t> Ways </a:t>
+            </a:r>
+            <a:r>
+              <a:rPr lang="en-US" sz="3600" b="1" dirty="0" err="1">
+                <a:solidFill>
+                  <a:srgbClr val="1E2761"/>
+                </a:solidFill>
+                <a:latin typeface="Cambria" pitchFamily="34" charset="0"/>
+                <a:ea typeface="Cambria" pitchFamily="34" charset="-122"/>
+                <a:cs typeface="Cambria" pitchFamily="34" charset="-120"/>
+              </a:rPr>
+              <a:t>Staytion</a:t>
+            </a:r>
+            <a:endParaRPr lang="en-US" sz="3600" dirty="0">
+              <a:solidFill>
+                <a:srgbClr val="1E2761"/>
+              </a:solidFill>
+            </a:endParaRPr>
           </a:p>
         </p:txBody>
       </p:sp>
+      <p:pic>
+        <p:nvPicPr>
+          <p:cNvPr id="13" name="Picture 12">
+            <a:extLst>
+              <a:ext uri="{FF2B5EF4-FFF2-40B4-BE49-F238E27FC236}">
+                <a16:creationId xmlns:a16="http://schemas.microsoft.com/office/drawing/2014/main" id="{F6B53CB2-3F9D-E065-061C-E02992F65061}"/>
+              </a:ext>
+            </a:extLst>
+          </p:cNvPr>
+          <p:cNvPicPr>
+            <a:picLocks noChangeAspect="1"/>
+          </p:cNvPicPr>
+          <p:nvPr/>
+        </p:nvPicPr>
+        <p:blipFill>
+          <a:blip r:embed="rId3"/>
+          <a:stretch>
+            <a:fillRect/>
+          </a:stretch>
+        </p:blipFill>
+        <p:spPr>
+          <a:xfrm>
+            <a:off x="687887" y="134968"/>
+            <a:ext cx="1302204" cy="1325880"/>
+          </a:xfrm>
+          <a:prstGeom prst="rect">
+            <a:avLst/>
+          </a:prstGeom>
+        </p:spPr>
+      </p:pic>
       <p:sp>
         <p:nvSpPr>
-          <p:cNvPr id="3" name="Text 1"/>
+          <p:cNvPr id="15" name="Text 1">
+            <a:extLst>
+              <a:ext uri="{FF2B5EF4-FFF2-40B4-BE49-F238E27FC236}">
+                <a16:creationId xmlns:a16="http://schemas.microsoft.com/office/drawing/2014/main" id="{A1A3CEDF-77AB-5B2E-ADEF-AC72B281342E}"/>
+              </a:ext>
+            </a:extLst>
+          </p:cNvPr>
           <p:cNvSpPr txBox="1"/>
           <p:nvPr/>
         </p:nvSpPr>
         <p:spPr>
           <a:xfrm>
-            <a:off x="640080" y="1143000"/>
-            <a:ext cx="7863840" cy="1325880"/>
+            <a:off x="2167799" y="158571"/>
+            <a:ext cx="6860455" cy="639337"/>
           </a:xfrm>
           <a:prstGeom prst="rect">
             <a:avLst/>
@@ -2312,50 +2504,84 @@
               <a:buNone/>
             </a:pPr>
             <a:r>
-              <a:rPr lang="en-US" sz="3600" b="1" dirty="0">
+              <a:rPr lang="en-US" sz="2000" b="1" dirty="0">
                 <a:solidFill>
-                  <a:srgbClr val="FFFFFF"/>
+                  <a:srgbClr val="1E2761"/>
                 </a:solidFill>
                 <a:latin typeface="Cambria" pitchFamily="34" charset="0"/>
                 <a:ea typeface="Cambria" pitchFamily="34" charset="-122"/>
                 <a:cs typeface="Cambria" pitchFamily="34" charset="-120"/>
               </a:rPr>
-              <a:t>Ứng dụng AI dự báo</a:t>
+              <a:t>Trường </a:t>
             </a:r>
-            <a:endParaRPr lang="en-US" sz="3600" dirty="0"/>
-          </a:p>
-          <a:p>
-            <a:pPr marL="0" indent="0">
-              <a:lnSpc>
-                <a:spcPts val="4000"/>
-              </a:lnSpc>
-              <a:buNone/>
-            </a:pPr>
             <a:r>
-              <a:rPr lang="en-US" sz="3600" b="1" dirty="0">
+              <a:rPr lang="en-US" sz="2000" b="1" dirty="0" err="1">
                 <a:solidFill>
-                  <a:srgbClr val="FFFFFF"/>
+                  <a:srgbClr val="1E2761"/>
                 </a:solidFill>
                 <a:latin typeface="Cambria" pitchFamily="34" charset="0"/>
                 <a:ea typeface="Cambria" pitchFamily="34" charset="-122"/>
                 <a:cs typeface="Cambria" pitchFamily="34" charset="-120"/>
               </a:rPr>
-              <a:t>lưu lượng khách hàng</a:t>
+              <a:t>Đại</a:t>
             </a:r>
-            <a:endParaRPr lang="en-US" sz="3600" dirty="0"/>
+            <a:r>
+              <a:rPr lang="en-US" sz="2000" b="1" dirty="0">
+                <a:solidFill>
+                  <a:srgbClr val="1E2761"/>
+                </a:solidFill>
+                <a:latin typeface="Cambria" pitchFamily="34" charset="0"/>
+                <a:ea typeface="Cambria" pitchFamily="34" charset="-122"/>
+                <a:cs typeface="Cambria" pitchFamily="34" charset="-120"/>
+              </a:rPr>
+              <a:t> Học Công </a:t>
+            </a:r>
+            <a:r>
+              <a:rPr lang="en-US" sz="2000" b="1" dirty="0" err="1">
+                <a:solidFill>
+                  <a:srgbClr val="1E2761"/>
+                </a:solidFill>
+                <a:latin typeface="Cambria" pitchFamily="34" charset="0"/>
+                <a:ea typeface="Cambria" pitchFamily="34" charset="-122"/>
+                <a:cs typeface="Cambria" pitchFamily="34" charset="-120"/>
+              </a:rPr>
+              <a:t>Nghệ</a:t>
+            </a:r>
+            <a:r>
+              <a:rPr lang="en-US" sz="2000" b="1" dirty="0">
+                <a:solidFill>
+                  <a:srgbClr val="1E2761"/>
+                </a:solidFill>
+                <a:latin typeface="Cambria" pitchFamily="34" charset="0"/>
+                <a:ea typeface="Cambria" pitchFamily="34" charset="-122"/>
+                <a:cs typeface="Cambria" pitchFamily="34" charset="-120"/>
+              </a:rPr>
+              <a:t> Thông Tin - ĐHQG - HCM </a:t>
+            </a:r>
+            <a:endParaRPr lang="en-US" sz="2000" dirty="0">
+              <a:solidFill>
+                <a:srgbClr val="1E2761"/>
+              </a:solidFill>
+            </a:endParaRPr>
           </a:p>
         </p:txBody>
       </p:sp>
       <p:sp>
         <p:nvSpPr>
-          <p:cNvPr id="4" name="Text 2"/>
+          <p:cNvPr id="17" name="Text 1">
+            <a:extLst>
+              <a:ext uri="{FF2B5EF4-FFF2-40B4-BE49-F238E27FC236}">
+                <a16:creationId xmlns:a16="http://schemas.microsoft.com/office/drawing/2014/main" id="{7D1ED117-3882-53FB-262C-8B82FDA1E4DF}"/>
+              </a:ext>
+            </a:extLst>
+          </p:cNvPr>
           <p:cNvSpPr txBox="1"/>
           <p:nvPr/>
         </p:nvSpPr>
         <p:spPr>
           <a:xfrm>
-            <a:off x="640080" y="2606040"/>
-            <a:ext cx="7863840" cy="640080"/>
+            <a:off x="2167800" y="601702"/>
+            <a:ext cx="6860455" cy="639337"/>
           </a:xfrm>
           <a:prstGeom prst="rect">
             <a:avLst/>
@@ -2368,237 +2594,112 @@
           <a:lstStyle/>
           <a:p>
             <a:pPr marL="0" indent="0">
+              <a:lnSpc>
+                <a:spcPts val="4000"/>
+              </a:lnSpc>
               <a:buNone/>
             </a:pPr>
             <a:r>
-              <a:rPr lang="en-US" sz="1400" dirty="0">
+              <a:rPr lang="en-US" sz="2000" b="1" dirty="0">
                 <a:solidFill>
-                  <a:srgbClr val="CADCFC"/>
+                  <a:srgbClr val="1E2761"/>
                 </a:solidFill>
-                <a:latin typeface="Calibri" pitchFamily="34" charset="0"/>
-                <a:ea typeface="Calibri" pitchFamily="34" charset="-122"/>
-                <a:cs typeface="Calibri" pitchFamily="34" charset="-120"/>
+                <a:latin typeface="Cambria" pitchFamily="34" charset="0"/>
+                <a:ea typeface="Cambria" pitchFamily="34" charset="-122"/>
+                <a:cs typeface="Cambria" pitchFamily="34" charset="-120"/>
               </a:rPr>
-              <a:t>Mô hình học sâu và mô hình nền tảng chuỗi thời gian, triển khai cho chuỗi Ways Station đa chi nhánh</a:t>
+              <a:t>Trung Tâm </a:t>
             </a:r>
-            <a:endParaRPr lang="en-US" sz="1400" dirty="0"/>
+            <a:r>
+              <a:rPr lang="en-US" sz="2000" b="1" dirty="0" err="1">
+                <a:solidFill>
+                  <a:srgbClr val="1E2761"/>
+                </a:solidFill>
+                <a:latin typeface="Cambria" pitchFamily="34" charset="0"/>
+                <a:ea typeface="Cambria" pitchFamily="34" charset="-122"/>
+                <a:cs typeface="Cambria" pitchFamily="34" charset="-120"/>
+              </a:rPr>
+              <a:t>Phát</a:t>
+            </a:r>
+            <a:r>
+              <a:rPr lang="en-US" sz="2000" b="1" dirty="0">
+                <a:solidFill>
+                  <a:srgbClr val="1E2761"/>
+                </a:solidFill>
+                <a:latin typeface="Cambria" pitchFamily="34" charset="0"/>
+                <a:ea typeface="Cambria" pitchFamily="34" charset="-122"/>
+                <a:cs typeface="Cambria" pitchFamily="34" charset="-120"/>
+              </a:rPr>
+              <a:t> </a:t>
+            </a:r>
+            <a:r>
+              <a:rPr lang="en-US" sz="2000" b="1" dirty="0" err="1">
+                <a:solidFill>
+                  <a:srgbClr val="1E2761"/>
+                </a:solidFill>
+                <a:latin typeface="Cambria" pitchFamily="34" charset="0"/>
+                <a:ea typeface="Cambria" pitchFamily="34" charset="-122"/>
+                <a:cs typeface="Cambria" pitchFamily="34" charset="-120"/>
+              </a:rPr>
+              <a:t>Triển</a:t>
+            </a:r>
+            <a:r>
+              <a:rPr lang="en-US" sz="2000" b="1" dirty="0">
+                <a:solidFill>
+                  <a:srgbClr val="1E2761"/>
+                </a:solidFill>
+                <a:latin typeface="Cambria" pitchFamily="34" charset="0"/>
+                <a:ea typeface="Cambria" pitchFamily="34" charset="-122"/>
+                <a:cs typeface="Cambria" pitchFamily="34" charset="-120"/>
+              </a:rPr>
+              <a:t> Công </a:t>
+            </a:r>
+            <a:r>
+              <a:rPr lang="en-US" sz="2000" b="1" dirty="0" err="1">
+                <a:solidFill>
+                  <a:srgbClr val="1E2761"/>
+                </a:solidFill>
+                <a:latin typeface="Cambria" pitchFamily="34" charset="0"/>
+                <a:ea typeface="Cambria" pitchFamily="34" charset="-122"/>
+                <a:cs typeface="Cambria" pitchFamily="34" charset="-120"/>
+              </a:rPr>
+              <a:t>Nghệ</a:t>
+            </a:r>
+            <a:r>
+              <a:rPr lang="en-US" sz="2000" b="1" dirty="0">
+                <a:solidFill>
+                  <a:srgbClr val="1E2761"/>
+                </a:solidFill>
+                <a:latin typeface="Cambria" pitchFamily="34" charset="0"/>
+                <a:ea typeface="Cambria" pitchFamily="34" charset="-122"/>
+                <a:cs typeface="Cambria" pitchFamily="34" charset="-120"/>
+              </a:rPr>
+              <a:t> Thông tin</a:t>
+            </a:r>
+            <a:endParaRPr lang="en-US" sz="2000" dirty="0">
+              <a:solidFill>
+                <a:srgbClr val="1E2761"/>
+              </a:solidFill>
+            </a:endParaRPr>
           </a:p>
         </p:txBody>
       </p:sp>
       <p:sp>
         <p:nvSpPr>
-          <p:cNvPr id="5" name="Shape 3"/>
-          <p:cNvSpPr/>
-          <p:nvPr/>
-        </p:nvSpPr>
-        <p:spPr>
-          <a:xfrm>
-            <a:off x="640080" y="3383280"/>
-            <a:ext cx="2514600" cy="566928"/>
-          </a:xfrm>
-          <a:prstGeom prst="roundRect">
-            <a:avLst>
-              <a:gd name="adj" fmla="val 8065"/>
-            </a:avLst>
-          </a:prstGeom>
-          <a:solidFill>
-            <a:srgbClr val="34468C"/>
-          </a:solidFill>
-          <a:ln/>
-        </p:spPr>
-        <p:txBody>
-          <a:bodyPr/>
-          <a:lstStyle/>
-          <a:p>
-            <a:endParaRPr lang="en-US"/>
-          </a:p>
-        </p:txBody>
-      </p:sp>
-      <p:sp>
-        <p:nvSpPr>
-          <p:cNvPr id="6" name="Text 4"/>
+          <p:cNvPr id="19" name="Text 1">
+            <a:extLst>
+              <a:ext uri="{FF2B5EF4-FFF2-40B4-BE49-F238E27FC236}">
+                <a16:creationId xmlns:a16="http://schemas.microsoft.com/office/drawing/2014/main" id="{10CE08D3-3DCD-8FAB-404A-148F40267BE3}"/>
+              </a:ext>
+            </a:extLst>
+          </p:cNvPr>
           <p:cNvSpPr txBox="1"/>
           <p:nvPr/>
         </p:nvSpPr>
         <p:spPr>
           <a:xfrm>
-            <a:off x="640080" y="3383280"/>
-            <a:ext cx="2514600" cy="566928"/>
-          </a:xfrm>
-          <a:prstGeom prst="rect">
-            <a:avLst/>
-          </a:prstGeom>
-          <a:noFill/>
-          <a:ln/>
-        </p:spPr>
-        <p:txBody>
-          <a:bodyPr wrap="square" lIns="0" tIns="0" rIns="0" bIns="0" rtlCol="0" anchor="ctr"/>
-          <a:lstStyle/>
-          <a:p>
-            <a:pPr marL="0" indent="0" algn="ctr">
-              <a:buNone/>
-            </a:pPr>
-            <a:r>
-              <a:rPr lang="en-US" sz="1150" dirty="0">
-                <a:solidFill>
-                  <a:srgbClr val="FFFFFF"/>
-                </a:solidFill>
-                <a:latin typeface="Calibri" pitchFamily="34" charset="0"/>
-                <a:ea typeface="Calibri" pitchFamily="34" charset="-122"/>
-                <a:cs typeface="Calibri" pitchFamily="34" charset="-120"/>
-              </a:rPr>
-              <a:t>MAPE &lt; 10%</a:t>
-            </a:r>
-            <a:endParaRPr lang="en-US" sz="1150" dirty="0"/>
-          </a:p>
-        </p:txBody>
-      </p:sp>
-      <p:sp>
-        <p:nvSpPr>
-          <p:cNvPr id="7" name="Shape 5"/>
-          <p:cNvSpPr/>
-          <p:nvPr/>
-        </p:nvSpPr>
-        <p:spPr>
-          <a:xfrm>
-            <a:off x="3337560" y="3383280"/>
-            <a:ext cx="2514600" cy="566928"/>
-          </a:xfrm>
-          <a:prstGeom prst="roundRect">
-            <a:avLst>
-              <a:gd name="adj" fmla="val 8065"/>
-            </a:avLst>
-          </a:prstGeom>
-          <a:solidFill>
-            <a:srgbClr val="34468C"/>
-          </a:solidFill>
-          <a:ln/>
-        </p:spPr>
-        <p:txBody>
-          <a:bodyPr/>
-          <a:lstStyle/>
-          <a:p>
-            <a:endParaRPr lang="en-US"/>
-          </a:p>
-        </p:txBody>
-      </p:sp>
-      <p:sp>
-        <p:nvSpPr>
-          <p:cNvPr id="8" name="Text 6"/>
-          <p:cNvSpPr txBox="1"/>
-          <p:nvPr/>
-        </p:nvSpPr>
-        <p:spPr>
-          <a:xfrm>
-            <a:off x="3337560" y="3383280"/>
-            <a:ext cx="2514600" cy="566928"/>
-          </a:xfrm>
-          <a:prstGeom prst="rect">
-            <a:avLst/>
-          </a:prstGeom>
-          <a:noFill/>
-          <a:ln/>
-        </p:spPr>
-        <p:txBody>
-          <a:bodyPr wrap="square" lIns="0" tIns="0" rIns="0" bIns="0" rtlCol="0" anchor="ctr"/>
-          <a:lstStyle/>
-          <a:p>
-            <a:pPr marL="0" indent="0" algn="ctr">
-              <a:buNone/>
-            </a:pPr>
-            <a:r>
-              <a:rPr lang="en-US" sz="1150" dirty="0">
-                <a:solidFill>
-                  <a:srgbClr val="FFFFFF"/>
-                </a:solidFill>
-                <a:latin typeface="Calibri" pitchFamily="34" charset="0"/>
-                <a:ea typeface="Calibri" pitchFamily="34" charset="-122"/>
-                <a:cs typeface="Calibri" pitchFamily="34" charset="-120"/>
-              </a:rPr>
-              <a:t>API P95 ≤ 500ms</a:t>
-            </a:r>
-            <a:endParaRPr lang="en-US" sz="1150" dirty="0"/>
-          </a:p>
-        </p:txBody>
-      </p:sp>
-      <p:sp>
-        <p:nvSpPr>
-          <p:cNvPr id="9" name="Shape 7"/>
-          <p:cNvSpPr/>
-          <p:nvPr/>
-        </p:nvSpPr>
-        <p:spPr>
-          <a:xfrm>
-            <a:off x="6035040" y="3383280"/>
-            <a:ext cx="2514600" cy="566928"/>
-          </a:xfrm>
-          <a:prstGeom prst="roundRect">
-            <a:avLst>
-              <a:gd name="adj" fmla="val 8065"/>
-            </a:avLst>
-          </a:prstGeom>
-          <a:solidFill>
-            <a:srgbClr val="34468C"/>
-          </a:solidFill>
-          <a:ln/>
-        </p:spPr>
-        <p:txBody>
-          <a:bodyPr/>
-          <a:lstStyle/>
-          <a:p>
-            <a:endParaRPr lang="en-US"/>
-          </a:p>
-        </p:txBody>
-      </p:sp>
-      <p:sp>
-        <p:nvSpPr>
-          <p:cNvPr id="10" name="Text 8"/>
-          <p:cNvSpPr txBox="1"/>
-          <p:nvPr/>
-        </p:nvSpPr>
-        <p:spPr>
-          <a:xfrm>
-            <a:off x="6035040" y="3383280"/>
-            <a:ext cx="2514600" cy="566928"/>
-          </a:xfrm>
-          <a:prstGeom prst="rect">
-            <a:avLst/>
-          </a:prstGeom>
-          <a:noFill/>
-          <a:ln/>
-        </p:spPr>
-        <p:txBody>
-          <a:bodyPr wrap="square" lIns="0" tIns="0" rIns="0" bIns="0" rtlCol="0" anchor="ctr"/>
-          <a:lstStyle/>
-          <a:p>
-            <a:pPr marL="0" indent="0" algn="ctr">
-              <a:buNone/>
-            </a:pPr>
-            <a:r>
-              <a:rPr lang="en-US" sz="1150" dirty="0">
-                <a:solidFill>
-                  <a:srgbClr val="FFFFFF"/>
-                </a:solidFill>
-                <a:latin typeface="Calibri" pitchFamily="34" charset="0"/>
-                <a:ea typeface="Calibri" pitchFamily="34" charset="-122"/>
-                <a:cs typeface="Calibri" pitchFamily="34" charset="-120"/>
-              </a:rPr>
-              <a:t>Triển khai 15 tuần</a:t>
-            </a:r>
-            <a:endParaRPr lang="en-US" sz="1150" dirty="0"/>
-          </a:p>
-        </p:txBody>
-      </p:sp>
-      <p:sp>
-        <p:nvSpPr>
-          <p:cNvPr id="11" name="Text 9"/>
-          <p:cNvSpPr txBox="1"/>
-          <p:nvPr/>
-        </p:nvSpPr>
-        <p:spPr>
-          <a:xfrm>
-            <a:off x="640080" y="4206240"/>
-            <a:ext cx="7863840" cy="274320"/>
+            <a:off x="2929796" y="3873004"/>
+            <a:ext cx="6860455" cy="639337"/>
           </a:xfrm>
           <a:prstGeom prst="rect">
             <a:avLst/>
@@ -2611,20 +2712,27 @@
           <a:lstStyle/>
           <a:p>
             <a:pPr marL="0" indent="0">
+              <a:lnSpc>
+                <a:spcPts val="4000"/>
+              </a:lnSpc>
               <a:buNone/>
             </a:pPr>
             <a:r>
-              <a:rPr lang="en-US" sz="1200" dirty="0">
+              <a:rPr lang="en-US" sz="2000" b="1" dirty="0">
                 <a:solidFill>
-                  <a:srgbClr val="CADCFC"/>
+                  <a:srgbClr val="1E2761"/>
                 </a:solidFill>
-                <a:latin typeface="Calibri" pitchFamily="34" charset="0"/>
-                <a:ea typeface="Calibri" pitchFamily="34" charset="-122"/>
-                <a:cs typeface="Calibri" pitchFamily="34" charset="-120"/>
+                <a:latin typeface="Cambria" pitchFamily="34" charset="0"/>
+                <a:ea typeface="Cambria" pitchFamily="34" charset="-122"/>
+                <a:cs typeface="Cambria" pitchFamily="34" charset="-120"/>
               </a:rPr>
-              <a:t>Nhóm 5  ·  34 chi nhánh  ·  TP. Hồ Chí Minh</a:t>
+              <a:t>GVHD: Nguyễn Thị Anh Thư</a:t>
             </a:r>
-            <a:endParaRPr lang="en-US" sz="1200" dirty="0"/>
+            <a:endParaRPr lang="en-US" sz="2000" dirty="0">
+              <a:solidFill>
+                <a:srgbClr val="1E2761"/>
+              </a:solidFill>
+            </a:endParaRPr>
           </a:p>
         </p:txBody>
       </p:sp>
@@ -2639,14 +2747,6 @@
 <file path=ppt/slides/slide10.xml><?xml version="1.0" encoding="utf-8"?>
 <p:sld xmlns:a="http://schemas.openxmlformats.org/drawingml/2006/main" xmlns:r="http://schemas.openxmlformats.org/officeDocument/2006/relationships" xmlns:p="http://schemas.openxmlformats.org/presentationml/2006/main">
   <p:cSld name="Slide 10">
-    <p:bg>
-      <p:bgPr>
-        <a:solidFill>
-          <a:srgbClr val="FFFFFF"/>
-        </a:solidFill>
-        <a:effectLst/>
-      </p:bgPr>
-    </p:bg>
     <p:spTree>
       <p:nvGrpSpPr>
         <p:cNvPr id="1" name=""/>
@@ -4781,14 +4881,6 @@
 <file path=ppt/slides/slide11.xml><?xml version="1.0" encoding="utf-8"?>
 <p:sld xmlns:a="http://schemas.openxmlformats.org/drawingml/2006/main" xmlns:r="http://schemas.openxmlformats.org/officeDocument/2006/relationships" xmlns:p="http://schemas.openxmlformats.org/presentationml/2006/main">
   <p:cSld name="Slide 11">
-    <p:bg>
-      <p:bgPr>
-        <a:solidFill>
-          <a:srgbClr val="FFFFFF"/>
-        </a:solidFill>
-        <a:effectLst/>
-      </p:bgPr>
-    </p:bg>
     <p:spTree>
       <p:nvGrpSpPr>
         <p:cNvPr id="1" name=""/>
@@ -5457,14 +5549,6 @@
 <file path=ppt/slides/slide12.xml><?xml version="1.0" encoding="utf-8"?>
 <p:sld xmlns:a="http://schemas.openxmlformats.org/drawingml/2006/main" xmlns:r="http://schemas.openxmlformats.org/officeDocument/2006/relationships" xmlns:p="http://schemas.openxmlformats.org/presentationml/2006/main">
   <p:cSld name="Slide 12">
-    <p:bg>
-      <p:bgPr>
-        <a:solidFill>
-          <a:srgbClr val="FFFFFF"/>
-        </a:solidFill>
-        <a:effectLst/>
-      </p:bgPr>
-    </p:bg>
     <p:spTree>
       <p:nvGrpSpPr>
         <p:cNvPr id="1" name=""/>
@@ -8099,14 +8183,6 @@
 <file path=ppt/slides/slide13.xml><?xml version="1.0" encoding="utf-8"?>
 <p:sld xmlns:a="http://schemas.openxmlformats.org/drawingml/2006/main" xmlns:r="http://schemas.openxmlformats.org/officeDocument/2006/relationships" xmlns:p="http://schemas.openxmlformats.org/presentationml/2006/main">
   <p:cSld name="Slide 13">
-    <p:bg>
-      <p:bgPr>
-        <a:solidFill>
-          <a:srgbClr val="FFFFFF"/>
-        </a:solidFill>
-        <a:effectLst/>
-      </p:bgPr>
-    </p:bg>
     <p:spTree>
       <p:nvGrpSpPr>
         <p:cNvPr id="1" name=""/>
@@ -9081,14 +9157,6 @@
 <file path=ppt/slides/slide14.xml><?xml version="1.0" encoding="utf-8"?>
 <p:sld xmlns:a="http://schemas.openxmlformats.org/drawingml/2006/main" xmlns:r="http://schemas.openxmlformats.org/officeDocument/2006/relationships" xmlns:p="http://schemas.openxmlformats.org/presentationml/2006/main">
   <p:cSld name="Slide 14">
-    <p:bg>
-      <p:bgPr>
-        <a:solidFill>
-          <a:srgbClr val="FFFFFF"/>
-        </a:solidFill>
-        <a:effectLst/>
-      </p:bgPr>
-    </p:bg>
     <p:spTree>
       <p:nvGrpSpPr>
         <p:cNvPr id="1" name=""/>
@@ -9528,14 +9596,6 @@
 <file path=ppt/slides/slide15.xml><?xml version="1.0" encoding="utf-8"?>
 <p:sld xmlns:a="http://schemas.openxmlformats.org/drawingml/2006/main" xmlns:r="http://schemas.openxmlformats.org/officeDocument/2006/relationships" xmlns:p="http://schemas.openxmlformats.org/presentationml/2006/main">
   <p:cSld name="Slide 15">
-    <p:bg>
-      <p:bgPr>
-        <a:solidFill>
-          <a:srgbClr val="FFFFFF"/>
-        </a:solidFill>
-        <a:effectLst/>
-      </p:bgPr>
-    </p:bg>
     <p:spTree>
       <p:nvGrpSpPr>
         <p:cNvPr id="1" name=""/>
@@ -12244,14 +12304,6 @@
 <file path=ppt/slides/slide16.xml><?xml version="1.0" encoding="utf-8"?>
 <p:sld xmlns:a="http://schemas.openxmlformats.org/drawingml/2006/main" xmlns:r="http://schemas.openxmlformats.org/officeDocument/2006/relationships" xmlns:p="http://schemas.openxmlformats.org/presentationml/2006/main">
   <p:cSld name="Slide 16">
-    <p:bg>
-      <p:bgPr>
-        <a:solidFill>
-          <a:srgbClr val="FFFFFF"/>
-        </a:solidFill>
-        <a:effectLst/>
-      </p:bgPr>
-    </p:bg>
     <p:spTree>
       <p:nvGrpSpPr>
         <p:cNvPr id="1" name=""/>
@@ -14157,14 +14209,6 @@
 <file path=ppt/slides/slide17.xml><?xml version="1.0" encoding="utf-8"?>
 <p:sld xmlns:a="http://schemas.openxmlformats.org/drawingml/2006/main" xmlns:r="http://schemas.openxmlformats.org/officeDocument/2006/relationships" xmlns:p="http://schemas.openxmlformats.org/presentationml/2006/main">
   <p:cSld name="Slide 17">
-    <p:bg>
-      <p:bgPr>
-        <a:solidFill>
-          <a:srgbClr val="FFFFFF"/>
-        </a:solidFill>
-        <a:effectLst/>
-      </p:bgPr>
-    </p:bg>
     <p:spTree>
       <p:nvGrpSpPr>
         <p:cNvPr id="1" name=""/>
@@ -16810,14 +16854,6 @@
 <file path=ppt/slides/slide18.xml><?xml version="1.0" encoding="utf-8"?>
 <p:sld xmlns:a="http://schemas.openxmlformats.org/drawingml/2006/main" xmlns:r="http://schemas.openxmlformats.org/officeDocument/2006/relationships" xmlns:p="http://schemas.openxmlformats.org/presentationml/2006/main">
   <p:cSld name="Slide 18">
-    <p:bg>
-      <p:bgPr>
-        <a:solidFill>
-          <a:srgbClr val="FFFFFF"/>
-        </a:solidFill>
-        <a:effectLst/>
-      </p:bgPr>
-    </p:bg>
     <p:spTree>
       <p:nvGrpSpPr>
         <p:cNvPr id="1" name=""/>
@@ -17493,14 +17529,6 @@
 <file path=ppt/slides/slide19.xml><?xml version="1.0" encoding="utf-8"?>
 <p:sld xmlns:a="http://schemas.openxmlformats.org/drawingml/2006/main" xmlns:r="http://schemas.openxmlformats.org/officeDocument/2006/relationships" xmlns:p="http://schemas.openxmlformats.org/presentationml/2006/main">
   <p:cSld name="Slide 19">
-    <p:bg>
-      <p:bgPr>
-        <a:solidFill>
-          <a:srgbClr val="1E2761"/>
-        </a:solidFill>
-        <a:effectLst/>
-      </p:bgPr>
-    </p:bg>
     <p:spTree>
       <p:nvGrpSpPr>
         <p:cNvPr id="1" name=""/>
@@ -18141,14 +18169,6 @@
 <file path=ppt/slides/slide2.xml><?xml version="1.0" encoding="utf-8"?>
 <p:sld xmlns:a="http://schemas.openxmlformats.org/drawingml/2006/main" xmlns:r="http://schemas.openxmlformats.org/officeDocument/2006/relationships" xmlns:p="http://schemas.openxmlformats.org/presentationml/2006/main">
   <p:cSld name="Slide 2">
-    <p:bg>
-      <p:bgPr>
-        <a:solidFill>
-          <a:srgbClr val="FFFFFF"/>
-        </a:solidFill>
-        <a:effectLst/>
-      </p:bgPr>
-    </p:bg>
     <p:spTree>
       <p:nvGrpSpPr>
         <p:cNvPr id="1" name=""/>
@@ -20349,14 +20369,6 @@
 <file path=ppt/slides/slide3.xml><?xml version="1.0" encoding="utf-8"?>
 <p:sld xmlns:a="http://schemas.openxmlformats.org/drawingml/2006/main" xmlns:r="http://schemas.openxmlformats.org/officeDocument/2006/relationships" xmlns:p="http://schemas.openxmlformats.org/presentationml/2006/main">
   <p:cSld name="Slide 3">
-    <p:bg>
-      <p:bgPr>
-        <a:solidFill>
-          <a:srgbClr val="FFFFFF"/>
-        </a:solidFill>
-        <a:effectLst/>
-      </p:bgPr>
-    </p:bg>
     <p:spTree>
       <p:nvGrpSpPr>
         <p:cNvPr id="1" name=""/>
@@ -21133,14 +21145,6 @@
 <file path=ppt/slides/slide4.xml><?xml version="1.0" encoding="utf-8"?>
 <p:sld xmlns:a="http://schemas.openxmlformats.org/drawingml/2006/main" xmlns:r="http://schemas.openxmlformats.org/officeDocument/2006/relationships" xmlns:p="http://schemas.openxmlformats.org/presentationml/2006/main">
   <p:cSld name="Slide 4">
-    <p:bg>
-      <p:bgPr>
-        <a:solidFill>
-          <a:srgbClr val="FFFFFF"/>
-        </a:solidFill>
-        <a:effectLst/>
-      </p:bgPr>
-    </p:bg>
     <p:spTree>
       <p:nvGrpSpPr>
         <p:cNvPr id="1" name=""/>
@@ -21743,14 +21747,6 @@
 <file path=ppt/slides/slide5.xml><?xml version="1.0" encoding="utf-8"?>
 <p:sld xmlns:a="http://schemas.openxmlformats.org/drawingml/2006/main" xmlns:r="http://schemas.openxmlformats.org/officeDocument/2006/relationships" xmlns:p="http://schemas.openxmlformats.org/presentationml/2006/main">
   <p:cSld name="Slide 5">
-    <p:bg>
-      <p:bgPr>
-        <a:solidFill>
-          <a:srgbClr val="FFFFFF"/>
-        </a:solidFill>
-        <a:effectLst/>
-      </p:bgPr>
-    </p:bg>
     <p:spTree>
       <p:nvGrpSpPr>
         <p:cNvPr id="1" name=""/>
@@ -22229,14 +22225,6 @@
 <file path=ppt/slides/slide6.xml><?xml version="1.0" encoding="utf-8"?>
 <p:sld xmlns:a="http://schemas.openxmlformats.org/drawingml/2006/main" xmlns:r="http://schemas.openxmlformats.org/officeDocument/2006/relationships" xmlns:p="http://schemas.openxmlformats.org/presentationml/2006/main">
   <p:cSld name="Slide 6">
-    <p:bg>
-      <p:bgPr>
-        <a:solidFill>
-          <a:srgbClr val="FFFFFF"/>
-        </a:solidFill>
-        <a:effectLst/>
-      </p:bgPr>
-    </p:bg>
     <p:spTree>
       <p:nvGrpSpPr>
         <p:cNvPr id="1" name=""/>
@@ -24371,14 +24359,6 @@
 <file path=ppt/slides/slide7.xml><?xml version="1.0" encoding="utf-8"?>
 <p:sld xmlns:a="http://schemas.openxmlformats.org/drawingml/2006/main" xmlns:r="http://schemas.openxmlformats.org/officeDocument/2006/relationships" xmlns:p="http://schemas.openxmlformats.org/presentationml/2006/main">
   <p:cSld name="Slide 7">
-    <p:bg>
-      <p:bgPr>
-        <a:solidFill>
-          <a:srgbClr val="FFFFFF"/>
-        </a:solidFill>
-        <a:effectLst/>
-      </p:bgPr>
-    </p:bg>
     <p:spTree>
       <p:nvGrpSpPr>
         <p:cNvPr id="1" name=""/>
@@ -27177,14 +27157,6 @@
 <file path=ppt/slides/slide8.xml><?xml version="1.0" encoding="utf-8"?>
 <p:sld xmlns:a="http://schemas.openxmlformats.org/drawingml/2006/main" xmlns:r="http://schemas.openxmlformats.org/officeDocument/2006/relationships" xmlns:p="http://schemas.openxmlformats.org/presentationml/2006/main">
   <p:cSld name="Slide 8">
-    <p:bg>
-      <p:bgPr>
-        <a:solidFill>
-          <a:srgbClr val="FFFFFF"/>
-        </a:solidFill>
-        <a:effectLst/>
-      </p:bgPr>
-    </p:bg>
     <p:spTree>
       <p:nvGrpSpPr>
         <p:cNvPr id="1" name=""/>
@@ -29186,14 +29158,6 @@
 <file path=ppt/slides/slide9.xml><?xml version="1.0" encoding="utf-8"?>
 <p:sld xmlns:a="http://schemas.openxmlformats.org/drawingml/2006/main" xmlns:r="http://schemas.openxmlformats.org/officeDocument/2006/relationships" xmlns:p="http://schemas.openxmlformats.org/presentationml/2006/main">
   <p:cSld name="Slide 9">
-    <p:bg>
-      <p:bgPr>
-        <a:solidFill>
-          <a:srgbClr val="FFFFFF"/>
-        </a:solidFill>
-        <a:effectLst/>
-      </p:bgPr>
-    </p:bg>
     <p:spTree>
       <p:nvGrpSpPr>
         <p:cNvPr id="1" name=""/>
